--- a/proposals/機種分析/東京リベンジャーズ/tokyorevengers_guide_v1.pptx
+++ b/proposals/機種分析/東京リベンジャーズ/tokyorevengers_guide_v1.pptx
@@ -3363,7 +3363,7 @@
         <p:spPr>
           <a:xfrm>
             <a:off x="201168" y="2743200"/>
-            <a:ext cx="1600200" cy="205000"/>
+            <a:ext cx="1600200" cy="165000"/>
           </a:xfrm>
           <a:prstGeom prst="rect">
             <a:avLst/>
@@ -3378,7 +3378,7 @@
           <a:p>
             <a:pPr algn="l"/>
             <a:r>
-              <a:rPr sz="750" b="0">
+              <a:rPr sz="700" b="0">
                 <a:solidFill>
                   <a:srgbClr val="998870"/>
                 </a:solidFill>
@@ -3398,7 +3398,7 @@
         <p:spPr>
           <a:xfrm>
             <a:off x="1801368" y="2743200"/>
-            <a:ext cx="2971800" cy="205000"/>
+            <a:ext cx="2971800" cy="165000"/>
           </a:xfrm>
           <a:prstGeom prst="rect">
             <a:avLst/>
@@ -3413,7 +3413,7 @@
           <a:p>
             <a:pPr algn="l"/>
             <a:r>
-              <a:rPr sz="750" b="1">
+              <a:rPr sz="700" b="1">
                 <a:solidFill>
                   <a:srgbClr val="F2EEE0"/>
                 </a:solidFill>
@@ -3432,8 +3432,8 @@
         </p:nvSpPr>
         <p:spPr>
           <a:xfrm>
-            <a:off x="201168" y="2963200"/>
-            <a:ext cx="1600200" cy="205000"/>
+            <a:off x="201168" y="2918200"/>
+            <a:ext cx="1600200" cy="165000"/>
           </a:xfrm>
           <a:prstGeom prst="rect">
             <a:avLst/>
@@ -3448,7 +3448,7 @@
           <a:p>
             <a:pPr algn="l"/>
             <a:r>
-              <a:rPr sz="750" b="0">
+              <a:rPr sz="700" b="0">
                 <a:solidFill>
                   <a:srgbClr val="998870"/>
                 </a:solidFill>
@@ -3467,8 +3467,8 @@
         </p:nvSpPr>
         <p:spPr>
           <a:xfrm>
-            <a:off x="1801368" y="2963200"/>
-            <a:ext cx="2971800" cy="205000"/>
+            <a:off x="1801368" y="2918200"/>
+            <a:ext cx="2971800" cy="165000"/>
           </a:xfrm>
           <a:prstGeom prst="rect">
             <a:avLst/>
@@ -3483,7 +3483,7 @@
           <a:p>
             <a:pPr algn="l"/>
             <a:r>
-              <a:rPr sz="750" b="1">
+              <a:rPr sz="700" b="1">
                 <a:solidFill>
                   <a:srgbClr val="F2EEE0"/>
                 </a:solidFill>
@@ -3502,8 +3502,8 @@
         </p:nvSpPr>
         <p:spPr>
           <a:xfrm>
-            <a:off x="201168" y="3183200"/>
-            <a:ext cx="1600200" cy="205000"/>
+            <a:off x="201168" y="3093200"/>
+            <a:ext cx="1600200" cy="165000"/>
           </a:xfrm>
           <a:prstGeom prst="rect">
             <a:avLst/>
@@ -3518,7 +3518,7 @@
           <a:p>
             <a:pPr algn="l"/>
             <a:r>
-              <a:rPr sz="750" b="0">
+              <a:rPr sz="700" b="0">
                 <a:solidFill>
                   <a:srgbClr val="998870"/>
                 </a:solidFill>
@@ -3537,8 +3537,8 @@
         </p:nvSpPr>
         <p:spPr>
           <a:xfrm>
-            <a:off x="1801368" y="3183200"/>
-            <a:ext cx="2971800" cy="205000"/>
+            <a:off x="1801368" y="3093200"/>
+            <a:ext cx="2971800" cy="165000"/>
           </a:xfrm>
           <a:prstGeom prst="rect">
             <a:avLst/>
@@ -3553,7 +3553,7 @@
           <a:p>
             <a:pPr algn="l"/>
             <a:r>
-              <a:rPr sz="750" b="1">
+              <a:rPr sz="700" b="1">
                 <a:solidFill>
                   <a:srgbClr val="F2EEE0"/>
                 </a:solidFill>
@@ -3572,8 +3572,8 @@
         </p:nvSpPr>
         <p:spPr>
           <a:xfrm>
-            <a:off x="201168" y="3403200"/>
-            <a:ext cx="1600200" cy="205000"/>
+            <a:off x="201168" y="3268200"/>
+            <a:ext cx="1600200" cy="165000"/>
           </a:xfrm>
           <a:prstGeom prst="rect">
             <a:avLst/>
@@ -3588,7 +3588,7 @@
           <a:p>
             <a:pPr algn="l"/>
             <a:r>
-              <a:rPr sz="750" b="0">
+              <a:rPr sz="700" b="0">
                 <a:solidFill>
                   <a:srgbClr val="998870"/>
                 </a:solidFill>
@@ -3607,8 +3607,8 @@
         </p:nvSpPr>
         <p:spPr>
           <a:xfrm>
-            <a:off x="1801368" y="3403200"/>
-            <a:ext cx="2971800" cy="205000"/>
+            <a:off x="1801368" y="3268200"/>
+            <a:ext cx="2971800" cy="165000"/>
           </a:xfrm>
           <a:prstGeom prst="rect">
             <a:avLst/>
@@ -3623,7 +3623,7 @@
           <a:p>
             <a:pPr algn="l"/>
             <a:r>
-              <a:rPr sz="750" b="1">
+              <a:rPr sz="700" b="1">
                 <a:solidFill>
                   <a:srgbClr val="F2EEE0"/>
                 </a:solidFill>
@@ -3642,8 +3642,8 @@
         </p:nvSpPr>
         <p:spPr>
           <a:xfrm>
-            <a:off x="201168" y="3623200"/>
-            <a:ext cx="1600200" cy="205000"/>
+            <a:off x="201168" y="3443200"/>
+            <a:ext cx="1600200" cy="165000"/>
           </a:xfrm>
           <a:prstGeom prst="rect">
             <a:avLst/>
@@ -3658,7 +3658,7 @@
           <a:p>
             <a:pPr algn="l"/>
             <a:r>
-              <a:rPr sz="750" b="0">
+              <a:rPr sz="700" b="0">
                 <a:solidFill>
                   <a:srgbClr val="998870"/>
                 </a:solidFill>
@@ -3677,8 +3677,8 @@
         </p:nvSpPr>
         <p:spPr>
           <a:xfrm>
-            <a:off x="1801368" y="3623200"/>
-            <a:ext cx="2971800" cy="205000"/>
+            <a:off x="1801368" y="3443200"/>
+            <a:ext cx="2971800" cy="165000"/>
           </a:xfrm>
           <a:prstGeom prst="rect">
             <a:avLst/>
@@ -3693,13 +3693,13 @@
           <a:p>
             <a:pPr algn="l"/>
             <a:r>
-              <a:rPr sz="750" b="1">
+              <a:rPr sz="700" b="1">
                 <a:solidFill>
                   <a:srgbClr val="F2EEE0"/>
                 </a:solidFill>
                 <a:latin typeface="メイリオ"/>
               </a:rPr>
-              <a:t>97〜98%前後（投資200Gで105%超）</a:t>
+              <a:t>97〜98%前後</a:t>
             </a:r>
           </a:p>
         </p:txBody>
@@ -3712,8 +3712,8 @@
         </p:nvSpPr>
         <p:spPr>
           <a:xfrm>
-            <a:off x="201168" y="3843200"/>
-            <a:ext cx="1600200" cy="205000"/>
+            <a:off x="201168" y="3618200"/>
+            <a:ext cx="1600200" cy="165000"/>
           </a:xfrm>
           <a:prstGeom prst="rect">
             <a:avLst/>
@@ -3728,7 +3728,7 @@
           <a:p>
             <a:pPr algn="l"/>
             <a:r>
-              <a:rPr sz="750" b="0">
+              <a:rPr sz="700" b="0">
                 <a:solidFill>
                   <a:srgbClr val="998870"/>
                 </a:solidFill>
@@ -3747,8 +3747,8 @@
         </p:nvSpPr>
         <p:spPr>
           <a:xfrm>
-            <a:off x="1801368" y="3843200"/>
-            <a:ext cx="2971800" cy="205000"/>
+            <a:off x="1801368" y="3618200"/>
+            <a:ext cx="2971800" cy="165000"/>
           </a:xfrm>
           <a:prstGeom prst="rect">
             <a:avLst/>
@@ -3763,7 +3763,7 @@
           <a:p>
             <a:pPr algn="l"/>
             <a:r>
-              <a:rPr sz="750" b="1">
+              <a:rPr sz="700" b="1">
                 <a:solidFill>
                   <a:srgbClr val="F2EEE0"/>
                 </a:solidFill>
@@ -3782,8 +3782,8 @@
         </p:nvSpPr>
         <p:spPr>
           <a:xfrm>
-            <a:off x="201168" y="4063200"/>
-            <a:ext cx="1600200" cy="205000"/>
+            <a:off x="201168" y="3793200"/>
+            <a:ext cx="1600200" cy="165000"/>
           </a:xfrm>
           <a:prstGeom prst="rect">
             <a:avLst/>
@@ -3798,7 +3798,7 @@
           <a:p>
             <a:pPr algn="l"/>
             <a:r>
-              <a:rPr sz="750" b="0">
+              <a:rPr sz="700" b="0">
                 <a:solidFill>
                   <a:srgbClr val="998870"/>
                 </a:solidFill>
@@ -3817,8 +3817,8 @@
         </p:nvSpPr>
         <p:spPr>
           <a:xfrm>
-            <a:off x="1801368" y="4063200"/>
-            <a:ext cx="2971800" cy="205000"/>
+            <a:off x="1801368" y="3793200"/>
+            <a:ext cx="2971800" cy="165000"/>
           </a:xfrm>
           <a:prstGeom prst="rect">
             <a:avLst/>
@@ -3833,13 +3833,13 @@
           <a:p>
             <a:pPr algn="l"/>
             <a:r>
-              <a:rPr sz="750" b="1">
+              <a:rPr sz="700" b="1">
                 <a:solidFill>
                   <a:srgbClr val="F2EEE0"/>
                 </a:solidFill>
                 <a:latin typeface="メイリオ"/>
               </a:rPr>
-              <a:t>周期6周期目（最大約500pt×6=3000pt相当）</a:t>
+              <a:t>周期6周期目でAT確定</a:t>
             </a:r>
           </a:p>
         </p:txBody>
@@ -3852,8 +3852,8 @@
         </p:nvSpPr>
         <p:spPr>
           <a:xfrm>
-            <a:off x="201168" y="4283200"/>
-            <a:ext cx="1600200" cy="205000"/>
+            <a:off x="201168" y="3968200"/>
+            <a:ext cx="1600200" cy="165000"/>
           </a:xfrm>
           <a:prstGeom prst="rect">
             <a:avLst/>
@@ -3868,7 +3868,7 @@
           <a:p>
             <a:pPr algn="l"/>
             <a:r>
-              <a:rPr sz="750" b="0">
+              <a:rPr sz="700" b="0">
                 <a:solidFill>
                   <a:srgbClr val="998870"/>
                 </a:solidFill>
@@ -3887,8 +3887,8 @@
         </p:nvSpPr>
         <p:spPr>
           <a:xfrm>
-            <a:off x="1801368" y="4283200"/>
-            <a:ext cx="2971800" cy="205000"/>
+            <a:off x="1801368" y="3968200"/>
+            <a:ext cx="2971800" cy="165000"/>
           </a:xfrm>
           <a:prstGeom prst="rect">
             <a:avLst/>
@@ -3903,7 +3903,7 @@
           <a:p>
             <a:pPr algn="l"/>
             <a:r>
-              <a:rPr sz="750" b="1">
+              <a:rPr sz="700" b="1">
                 <a:solidFill>
                   <a:srgbClr val="F2EEE0"/>
                 </a:solidFill>
@@ -3922,8 +3922,8 @@
         </p:nvSpPr>
         <p:spPr>
           <a:xfrm>
-            <a:off x="201168" y="4503200"/>
-            <a:ext cx="1600200" cy="205000"/>
+            <a:off x="201168" y="4143200"/>
+            <a:ext cx="1600200" cy="165000"/>
           </a:xfrm>
           <a:prstGeom prst="rect">
             <a:avLst/>
@@ -3938,13 +3938,13 @@
           <a:p>
             <a:pPr algn="l"/>
             <a:r>
-              <a:rPr sz="750" b="0">
+              <a:rPr sz="700" b="0">
                 <a:solidFill>
                   <a:srgbClr val="998870"/>
                 </a:solidFill>
                 <a:latin typeface="メイリオ"/>
               </a:rPr>
-              <a:t>初当り時AT期待度</a:t>
+              <a:t>AT初当り期待度</a:t>
             </a:r>
           </a:p>
         </p:txBody>
@@ -3957,8 +3957,8 @@
         </p:nvSpPr>
         <p:spPr>
           <a:xfrm>
-            <a:off x="1801368" y="4503200"/>
-            <a:ext cx="2971800" cy="205000"/>
+            <a:off x="1801368" y="4143200"/>
+            <a:ext cx="2971800" cy="165000"/>
           </a:xfrm>
           <a:prstGeom prst="rect">
             <a:avLst/>
@@ -3973,7 +3973,7 @@
           <a:p>
             <a:pPr algn="l"/>
             <a:r>
-              <a:rPr sz="750" b="1">
+              <a:rPr sz="700" b="1">
                 <a:solidFill>
                   <a:srgbClr val="F2EEE0"/>
                 </a:solidFill>
@@ -3992,8 +3992,8 @@
         </p:nvSpPr>
         <p:spPr>
           <a:xfrm>
-            <a:off x="201168" y="4723200"/>
-            <a:ext cx="1600200" cy="205000"/>
+            <a:off x="201168" y="4318200"/>
+            <a:ext cx="1600200" cy="165000"/>
           </a:xfrm>
           <a:prstGeom prst="rect">
             <a:avLst/>
@@ -4008,7 +4008,7 @@
           <a:p>
             <a:pPr algn="l"/>
             <a:r>
-              <a:rPr sz="750" b="0">
+              <a:rPr sz="700" b="0">
                 <a:solidFill>
                   <a:srgbClr val="998870"/>
                 </a:solidFill>
@@ -4027,8 +4027,8 @@
         </p:nvSpPr>
         <p:spPr>
           <a:xfrm>
-            <a:off x="1801368" y="4723200"/>
-            <a:ext cx="2971800" cy="205000"/>
+            <a:off x="1801368" y="4318200"/>
+            <a:ext cx="2971800" cy="165000"/>
           </a:xfrm>
           <a:prstGeom prst="rect">
             <a:avLst/>
@@ -4043,13 +4043,13 @@
           <a:p>
             <a:pPr algn="l"/>
             <a:r>
-              <a:rPr sz="750" b="1">
+              <a:rPr sz="700" b="1">
                 <a:solidFill>
                   <a:srgbClr val="F2EEE0"/>
                 </a:solidFill>
                 <a:latin typeface="メイリオ"/>
               </a:rPr>
-              <a:t>ミッドナイトモード（成功約50%）稀咲陰謀（成功約75%）</a:t>
+              <a:t>ミッドナイトモード(約50%) / 稀咲陰謀(約75%)</a:t>
             </a:r>
           </a:p>
         </p:txBody>
@@ -5892,8 +5892,8 @@
         </p:nvSpPr>
         <p:spPr>
           <a:xfrm>
-            <a:off x="256032" y="1984248"/>
-            <a:ext cx="1810512" cy="1080000"/>
+            <a:off x="274320" y="1984248"/>
+            <a:ext cx="1508760" cy="1080000"/>
           </a:xfrm>
           <a:prstGeom prst="rect">
             <a:avLst/>
@@ -5937,8 +5937,8 @@
         </p:nvSpPr>
         <p:spPr>
           <a:xfrm>
-            <a:off x="291032" y="2049248"/>
-            <a:ext cx="1750512" cy="380000"/>
+            <a:off x="304320" y="2049248"/>
+            <a:ext cx="1453760" cy="380000"/>
           </a:xfrm>
           <a:prstGeom prst="rect">
             <a:avLst/>
@@ -5953,7 +5953,7 @@
           <a:p>
             <a:pPr algn="ctr"/>
             <a:r>
-              <a:rPr sz="1000" b="1">
+              <a:rPr sz="950" b="1">
                 <a:solidFill>
                   <a:srgbClr val="CCAA30"/>
                 </a:solidFill>
@@ -5973,8 +5973,8 @@
         </p:nvSpPr>
         <p:spPr>
           <a:xfrm>
-            <a:off x="281032" y="2474248"/>
-            <a:ext cx="1765512" cy="480000"/>
+            <a:off x="294320" y="2474248"/>
+            <a:ext cx="1470760" cy="480000"/>
           </a:xfrm>
           <a:prstGeom prst="rect">
             <a:avLst/>
@@ -5989,7 +5989,7 @@
           <a:p>
             <a:pPr algn="ctr"/>
             <a:r>
-              <a:rPr sz="800" b="0">
+              <a:rPr sz="750" b="0">
                 <a:solidFill>
                   <a:srgbClr val="998870"/>
                 </a:solidFill>
@@ -6010,7 +6010,7 @@
         </p:nvSpPr>
         <p:spPr>
           <a:xfrm>
-            <a:off x="2078544" y="2434248"/>
+            <a:off x="1791080" y="2434248"/>
             <a:ext cx="200000" cy="180000"/>
           </a:xfrm>
           <a:prstGeom prst="can">
@@ -6053,8 +6053,8 @@
         </p:nvSpPr>
         <p:spPr>
           <a:xfrm>
-            <a:off x="2267712" y="1984248"/>
-            <a:ext cx="1810512" cy="1080000"/>
+            <a:off x="1938528" y="1984248"/>
+            <a:ext cx="1508760" cy="1080000"/>
           </a:xfrm>
           <a:prstGeom prst="rect">
             <a:avLst/>
@@ -6098,8 +6098,8 @@
         </p:nvSpPr>
         <p:spPr>
           <a:xfrm>
-            <a:off x="2302712" y="2049248"/>
-            <a:ext cx="1750512" cy="380000"/>
+            <a:off x="1968528" y="2049248"/>
+            <a:ext cx="1453760" cy="380000"/>
           </a:xfrm>
           <a:prstGeom prst="rect">
             <a:avLst/>
@@ -6114,7 +6114,7 @@
           <a:p>
             <a:pPr algn="ctr"/>
             <a:r>
-              <a:rPr sz="1000" b="1">
+              <a:rPr sz="950" b="1">
                 <a:solidFill>
                   <a:srgbClr val="FF6600"/>
                 </a:solidFill>
@@ -6134,8 +6134,8 @@
         </p:nvSpPr>
         <p:spPr>
           <a:xfrm>
-            <a:off x="2292712" y="2474248"/>
-            <a:ext cx="1765512" cy="480000"/>
+            <a:off x="1958528" y="2474248"/>
+            <a:ext cx="1470760" cy="480000"/>
           </a:xfrm>
           <a:prstGeom prst="rect">
             <a:avLst/>
@@ -6150,7 +6150,7 @@
           <a:p>
             <a:pPr algn="ctr"/>
             <a:r>
-              <a:rPr sz="800" b="0">
+              <a:rPr sz="750" b="0">
                 <a:solidFill>
                   <a:srgbClr val="998870"/>
                 </a:solidFill>
@@ -6171,7 +6171,7 @@
         </p:nvSpPr>
         <p:spPr>
           <a:xfrm>
-            <a:off x="4090224" y="2434248"/>
+            <a:off x="3455288" y="2434248"/>
             <a:ext cx="200000" cy="180000"/>
           </a:xfrm>
           <a:prstGeom prst="can">
@@ -6214,8 +6214,8 @@
         </p:nvSpPr>
         <p:spPr>
           <a:xfrm>
-            <a:off x="4279392" y="1984248"/>
-            <a:ext cx="1810512" cy="1080000"/>
+            <a:off x="3602736" y="1984248"/>
+            <a:ext cx="1508760" cy="1080000"/>
           </a:xfrm>
           <a:prstGeom prst="rect">
             <a:avLst/>
@@ -6259,8 +6259,8 @@
         </p:nvSpPr>
         <p:spPr>
           <a:xfrm>
-            <a:off x="4314392" y="2049248"/>
-            <a:ext cx="1750512" cy="380000"/>
+            <a:off x="3632736" y="2049248"/>
+            <a:ext cx="1453760" cy="380000"/>
           </a:xfrm>
           <a:prstGeom prst="rect">
             <a:avLst/>
@@ -6275,7 +6275,7 @@
           <a:p>
             <a:pPr algn="ctr"/>
             <a:r>
-              <a:rPr sz="1000" b="1">
+              <a:rPr sz="950" b="1">
                 <a:solidFill>
                   <a:srgbClr val="2266CC"/>
                 </a:solidFill>
@@ -6295,8 +6295,8 @@
         </p:nvSpPr>
         <p:spPr>
           <a:xfrm>
-            <a:off x="4304392" y="2474248"/>
-            <a:ext cx="1765512" cy="480000"/>
+            <a:off x="3622736" y="2474248"/>
+            <a:ext cx="1470760" cy="480000"/>
           </a:xfrm>
           <a:prstGeom prst="rect">
             <a:avLst/>
@@ -6311,7 +6311,7 @@
           <a:p>
             <a:pPr algn="ctr"/>
             <a:r>
-              <a:rPr sz="800" b="0">
+              <a:rPr sz="750" b="0">
                 <a:solidFill>
                   <a:srgbClr val="998870"/>
                 </a:solidFill>
@@ -6332,7 +6332,7 @@
         </p:nvSpPr>
         <p:spPr>
           <a:xfrm>
-            <a:off x="6101904" y="2434248"/>
+            <a:off x="5119496" y="2434248"/>
             <a:ext cx="200000" cy="180000"/>
           </a:xfrm>
           <a:prstGeom prst="can">
@@ -6375,8 +6375,8 @@
         </p:nvSpPr>
         <p:spPr>
           <a:xfrm>
-            <a:off x="6291072" y="1984248"/>
-            <a:ext cx="1810512" cy="1080000"/>
+            <a:off x="5266944" y="1984248"/>
+            <a:ext cx="1508760" cy="1080000"/>
           </a:xfrm>
           <a:prstGeom prst="rect">
             <a:avLst/>
@@ -6420,8 +6420,8 @@
         </p:nvSpPr>
         <p:spPr>
           <a:xfrm>
-            <a:off x="6326072" y="2049248"/>
-            <a:ext cx="1750512" cy="380000"/>
+            <a:off x="5296944" y="2049248"/>
+            <a:ext cx="1453760" cy="380000"/>
           </a:xfrm>
           <a:prstGeom prst="rect">
             <a:avLst/>
@@ -6436,7 +6436,7 @@
           <a:p>
             <a:pPr algn="ctr"/>
             <a:r>
-              <a:rPr sz="1000" b="1">
+              <a:rPr sz="950" b="1">
                 <a:solidFill>
                   <a:srgbClr val="FFDD55"/>
                 </a:solidFill>
@@ -6457,8 +6457,8 @@
         </p:nvSpPr>
         <p:spPr>
           <a:xfrm>
-            <a:off x="6316072" y="2474248"/>
-            <a:ext cx="1765512" cy="480000"/>
+            <a:off x="5286944" y="2474248"/>
+            <a:ext cx="1470760" cy="480000"/>
           </a:xfrm>
           <a:prstGeom prst="rect">
             <a:avLst/>
@@ -6473,7 +6473,7 @@
           <a:p>
             <a:pPr algn="ctr"/>
             <a:r>
-              <a:rPr sz="800" b="0">
+              <a:rPr sz="750" b="0">
                 <a:solidFill>
                   <a:srgbClr val="998870"/>
                 </a:solidFill>
@@ -6488,14 +6488,57 @@
       </p:sp>
       <p:sp>
         <p:nvSpPr>
-          <p:cNvPr id="46" name="Rectangle 45"/>
+          <p:cNvPr id="46" name="Can 45"/>
           <p:cNvSpPr/>
           <p:nvPr/>
         </p:nvSpPr>
         <p:spPr>
           <a:xfrm>
-            <a:off x="8302752" y="1984248"/>
-            <a:ext cx="1325880" cy="1080000"/>
+            <a:off x="6783704" y="2434248"/>
+            <a:ext cx="200000" cy="180000"/>
+          </a:xfrm>
+          <a:prstGeom prst="can">
+            <a:avLst/>
+          </a:prstGeom>
+          <a:solidFill>
+            <a:srgbClr val="FF6600"/>
+          </a:solidFill>
+          <a:ln>
+            <a:noFill/>
+          </a:ln>
+        </p:spPr>
+        <p:style>
+          <a:lnRef idx="1">
+            <a:schemeClr val="accent1"/>
+          </a:lnRef>
+          <a:fillRef idx="3">
+            <a:schemeClr val="accent1"/>
+          </a:fillRef>
+          <a:effectRef idx="2">
+            <a:schemeClr val="accent1"/>
+          </a:effectRef>
+          <a:fontRef idx="minor">
+            <a:schemeClr val="lt1"/>
+          </a:fontRef>
+        </p:style>
+        <p:txBody>
+          <a:bodyPr rtlCol="0" anchor="ctr"/>
+          <a:lstStyle/>
+          <a:p>
+            <a:pPr algn="ctr"/>
+          </a:p>
+        </p:txBody>
+      </p:sp>
+      <p:sp>
+        <p:nvSpPr>
+          <p:cNvPr id="47" name="Rectangle 46"/>
+          <p:cNvSpPr/>
+          <p:nvPr/>
+        </p:nvSpPr>
+        <p:spPr>
+          <a:xfrm>
+            <a:off x="6931152" y="1984248"/>
+            <a:ext cx="1508760" cy="1080000"/>
           </a:xfrm>
           <a:prstGeom prst="rect">
             <a:avLst/>
@@ -6533,57 +6576,14 @@
       </p:sp>
       <p:sp>
         <p:nvSpPr>
-          <p:cNvPr id="47" name="Rectangle 46"/>
-          <p:cNvSpPr/>
-          <p:nvPr/>
-        </p:nvSpPr>
-        <p:spPr>
-          <a:xfrm>
-            <a:off x="8302752" y="1984248"/>
-            <a:ext cx="28000" cy="1080000"/>
-          </a:xfrm>
-          <a:prstGeom prst="rect">
-            <a:avLst/>
-          </a:prstGeom>
-          <a:solidFill>
-            <a:srgbClr val="FF4488"/>
-          </a:solidFill>
-          <a:ln>
-            <a:noFill/>
-          </a:ln>
-        </p:spPr>
-        <p:style>
-          <a:lnRef idx="1">
-            <a:schemeClr val="accent1"/>
-          </a:lnRef>
-          <a:fillRef idx="3">
-            <a:schemeClr val="accent1"/>
-          </a:fillRef>
-          <a:effectRef idx="2">
-            <a:schemeClr val="accent1"/>
-          </a:effectRef>
-          <a:fontRef idx="minor">
-            <a:schemeClr val="lt1"/>
-          </a:fontRef>
-        </p:style>
-        <p:txBody>
-          <a:bodyPr rtlCol="0" anchor="ctr"/>
-          <a:lstStyle/>
-          <a:p>
-            <a:pPr algn="ctr"/>
-          </a:p>
-        </p:txBody>
-      </p:sp>
-      <p:sp>
-        <p:nvSpPr>
           <p:cNvPr id="48" name="TextBox 47"/>
           <p:cNvSpPr txBox="1"/>
           <p:nvPr/>
         </p:nvSpPr>
         <p:spPr>
           <a:xfrm>
-            <a:off x="8350752" y="2054248"/>
-            <a:ext cx="1097280" cy="310000"/>
+            <a:off x="6961152" y="2049248"/>
+            <a:ext cx="1453760" cy="380000"/>
           </a:xfrm>
           <a:prstGeom prst="rect">
             <a:avLst/>
@@ -6598,7 +6598,7 @@
           <a:p>
             <a:pPr algn="ctr"/>
             <a:r>
-              <a:rPr sz="900" b="1">
+              <a:rPr sz="950" b="1">
                 <a:solidFill>
                   <a:srgbClr val="FF4488"/>
                 </a:solidFill>
@@ -6619,8 +6619,8 @@
         </p:nvSpPr>
         <p:spPr>
           <a:xfrm>
-            <a:off x="8350752" y="2474248"/>
-            <a:ext cx="1097280" cy="460000"/>
+            <a:off x="6951152" y="2474248"/>
+            <a:ext cx="1470760" cy="480000"/>
           </a:xfrm>
           <a:prstGeom prst="rect">
             <a:avLst/>
@@ -6637,7 +6637,7 @@
             <a:r>
               <a:rPr sz="750" b="0">
                 <a:solidFill>
-                  <a:srgbClr val="F2EEE0"/>
+                  <a:srgbClr val="998870"/>
                 </a:solidFill>
                 <a:latin typeface="メイリオ"/>
               </a:rPr>
